--- a/docs/Kulpio_firSTep.pptx
+++ b/docs/Kulpio_firSTep.pptx
@@ -1754,7 +1754,7 @@
           <a:p>
             <a:r>
               <a:rPr lang="en-US" dirty="0"/>
-              <a:t>Real screenshots: the scanned product card, the impact screen, and the shared-fridge chat. Everything runs offline from a single HTML file.</a:t>
+              <a:t>Real screenshots: the scanned product card with an allergen warning, the impact screen, and the community Discover leaderboard. Everything runs offline from a single HTML file.</a:t>
             </a:r>
             <a:endParaRPr lang="en-US" dirty="0"/>
           </a:p>
@@ -1842,7 +1842,7 @@
           <a:p>
             <a:r>
               <a:rPr lang="en-US" dirty="0"/>
-              <a:t>A quick product tour: the home dashboard, the shared-fridge setup, the privacy/data controls, and the profile with levels and impact.</a:t>
+              <a:t>A quick product tour: the home dashboard, recipes from your ingredients, the per-item edit with price history, and the profile with levels and impact.</a:t>
             </a:r>
             <a:endParaRPr lang="en-US" dirty="0"/>
           </a:p>
@@ -2373,7 +2373,7 @@
     <p:bg>
       <p:bgPr>
         <a:solidFill>
-          <a:srgbClr val="0E1C12"/>
+          <a:srgbClr val="F4F7EF"/>
         </a:solidFill>
       </p:bgPr>
     </p:bg>
@@ -2399,14 +2399,14 @@
         </p:nvSpPr>
         <p:spPr>
           <a:xfrm>
-            <a:off x="9235440" y="-1737360"/>
-            <a:ext cx="5120640" cy="5120640"/>
+            <a:off x="10835640" y="5349240"/>
+            <a:ext cx="3200400" cy="3200400"/>
           </a:xfrm>
           <a:prstGeom prst="ellipse">
             <a:avLst/>
           </a:prstGeom>
           <a:solidFill>
-            <a:srgbClr val="1F5D33"/>
+            <a:srgbClr val="ECF3DF"/>
           </a:solidFill>
           <a:ln/>
         </p:spPr>
@@ -2419,41 +2419,21 @@
         </p:nvSpPr>
         <p:spPr>
           <a:xfrm>
-            <a:off x="10972800" y="2651760"/>
-            <a:ext cx="2011680" cy="2011680"/>
+            <a:off x="-868680" y="-868680"/>
+            <a:ext cx="2103120" cy="2103120"/>
           </a:xfrm>
           <a:prstGeom prst="ellipse">
             <a:avLst/>
           </a:prstGeom>
           <a:solidFill>
-            <a:srgbClr val="18301C"/>
+            <a:srgbClr val="EDF3E2"/>
           </a:solidFill>
           <a:ln/>
         </p:spPr>
       </p:sp>
       <p:sp>
         <p:nvSpPr>
-          <p:cNvPr id="4" name="Shape 2"/>
-          <p:cNvSpPr/>
-          <p:nvPr/>
-        </p:nvSpPr>
-        <p:spPr>
-          <a:xfrm>
-            <a:off x="10195560" y="1600200"/>
-            <a:ext cx="457200" cy="457200"/>
-          </a:xfrm>
-          <a:prstGeom prst="ellipse">
-            <a:avLst/>
-          </a:prstGeom>
-          <a:solidFill>
-            <a:srgbClr val="B5E048"/>
-          </a:solidFill>
-          <a:ln/>
-        </p:spPr>
-      </p:sp>
-      <p:sp>
-        <p:nvSpPr>
-          <p:cNvPr id="5" name="Text 3"/>
+          <p:cNvPr id="4" name="Text 2"/>
           <p:cNvSpPr/>
           <p:nvPr/>
         </p:nvSpPr>
@@ -2489,7 +2469,7 @@
       </p:sp>
       <p:sp>
         <p:nvSpPr>
-          <p:cNvPr id="6" name="Text 4"/>
+          <p:cNvPr id="5" name="Text 3"/>
           <p:cNvSpPr/>
           <p:nvPr/>
         </p:nvSpPr>
@@ -2514,7 +2494,7 @@
             <a:r>
               <a:rPr lang="en-US" sz="7000" b="1" dirty="0">
                 <a:solidFill>
-                  <a:srgbClr val="FFFFFF"/>
+                  <a:srgbClr val="1F5D33"/>
                 </a:solidFill>
                 <a:latin typeface="Calibri" pitchFamily="34" charset="0"/>
                 <a:ea typeface="Calibri" pitchFamily="34" charset="-122"/>
@@ -2528,7 +2508,7 @@
       </p:sp>
       <p:sp>
         <p:nvSpPr>
-          <p:cNvPr id="7" name="Text 5"/>
+          <p:cNvPr id="6" name="Text 4"/>
           <p:cNvSpPr/>
           <p:nvPr/>
         </p:nvSpPr>
@@ -2553,7 +2533,7 @@
             <a:r>
               <a:rPr lang="en-US" sz="2300" b="1" dirty="0">
                 <a:solidFill>
-                  <a:srgbClr val="B5E048"/>
+                  <a:srgbClr val="2C6E3F"/>
                 </a:solidFill>
                 <a:latin typeface="Calibri" pitchFamily="34" charset="0"/>
                 <a:ea typeface="Calibri" pitchFamily="34" charset="-122"/>
@@ -2567,7 +2547,7 @@
       </p:sp>
       <p:sp>
         <p:nvSpPr>
-          <p:cNvPr id="8" name="Text 6"/>
+          <p:cNvPr id="7" name="Text 5"/>
           <p:cNvSpPr/>
           <p:nvPr/>
         </p:nvSpPr>
@@ -2595,7 +2575,7 @@
             <a:r>
               <a:rPr lang="en-US" sz="1500" dirty="0">
                 <a:solidFill>
-                  <a:srgbClr val="CBD8C2"/>
+                  <a:srgbClr val="5B6B57"/>
                 </a:solidFill>
                 <a:latin typeface="Calibri" pitchFamily="34" charset="0"/>
                 <a:ea typeface="Calibri" pitchFamily="34" charset="-122"/>
@@ -2609,7 +2589,7 @@
       </p:sp>
       <p:sp>
         <p:nvSpPr>
-          <p:cNvPr id="9" name="Shape 7"/>
+          <p:cNvPr id="8" name="Shape 6"/>
           <p:cNvSpPr/>
           <p:nvPr/>
         </p:nvSpPr>
@@ -2631,7 +2611,7 @@
       </p:sp>
       <p:sp>
         <p:nvSpPr>
-          <p:cNvPr id="10" name="Text 8"/>
+          <p:cNvPr id="9" name="Text 7"/>
           <p:cNvSpPr/>
           <p:nvPr/>
         </p:nvSpPr>
@@ -2670,7 +2650,7 @@
       </p:sp>
       <p:sp>
         <p:nvSpPr>
-          <p:cNvPr id="11" name="Shape 9"/>
+          <p:cNvPr id="10" name="Shape 8"/>
           <p:cNvSpPr/>
           <p:nvPr/>
         </p:nvSpPr>
@@ -2692,7 +2672,7 @@
       </p:sp>
       <p:sp>
         <p:nvSpPr>
-          <p:cNvPr id="12" name="Text 10"/>
+          <p:cNvPr id="11" name="Text 9"/>
           <p:cNvSpPr/>
           <p:nvPr/>
         </p:nvSpPr>
@@ -2731,7 +2711,7 @@
       </p:sp>
       <p:sp>
         <p:nvSpPr>
-          <p:cNvPr id="13" name="Text 11"/>
+          <p:cNvPr id="12" name="Text 10"/>
           <p:cNvSpPr/>
           <p:nvPr/>
         </p:nvSpPr>
@@ -2759,7 +2739,7 @@
             <a:r>
               <a:rPr lang="en-US" sz="1500" b="1" dirty="0">
                 <a:solidFill>
-                  <a:srgbClr val="FFFFFF"/>
+                  <a:srgbClr val="16241A"/>
                 </a:solidFill>
                 <a:latin typeface="Calibri" pitchFamily="34" charset="0"/>
                 <a:ea typeface="Calibri" pitchFamily="34" charset="-122"/>
@@ -2777,7 +2757,7 @@
             <a:r>
               <a:rPr lang="en-US" sz="1300" dirty="0">
                 <a:solidFill>
-                  <a:srgbClr val="9FB396"/>
+                  <a:srgbClr val="5B6B57"/>
                 </a:solidFill>
                 <a:latin typeface="Calibri" pitchFamily="34" charset="0"/>
                 <a:ea typeface="Calibri" pitchFamily="34" charset="-122"/>
@@ -3962,7 +3942,7 @@
             </a:avLst>
           </a:prstGeom>
           <a:solidFill>
-            <a:srgbClr val="0E1C12"/>
+            <a:srgbClr val="1F5D33"/>
           </a:solidFill>
           <a:ln/>
           <a:effectLst>
@@ -7901,7 +7881,7 @@
     <p:bg>
       <p:bgPr>
         <a:solidFill>
-          <a:srgbClr val="0E1C12"/>
+          <a:srgbClr val="F4F7EF"/>
         </a:solidFill>
       </p:bgPr>
     </p:bg>
@@ -7927,14 +7907,14 @@
         </p:nvSpPr>
         <p:spPr>
           <a:xfrm>
-            <a:off x="9235440" y="-1737360"/>
-            <a:ext cx="5120640" cy="5120640"/>
+            <a:off x="10835640" y="5349240"/>
+            <a:ext cx="3200400" cy="3200400"/>
           </a:xfrm>
           <a:prstGeom prst="ellipse">
             <a:avLst/>
           </a:prstGeom>
           <a:solidFill>
-            <a:srgbClr val="1F5D33"/>
+            <a:srgbClr val="ECF3DF"/>
           </a:solidFill>
           <a:ln/>
         </p:spPr>
@@ -7947,14 +7927,14 @@
         </p:nvSpPr>
         <p:spPr>
           <a:xfrm>
-            <a:off x="10972800" y="2651760"/>
-            <a:ext cx="2011680" cy="2011680"/>
+            <a:off x="-868680" y="-868680"/>
+            <a:ext cx="2103120" cy="2103120"/>
           </a:xfrm>
           <a:prstGeom prst="ellipse">
             <a:avLst/>
           </a:prstGeom>
           <a:solidFill>
-            <a:srgbClr val="18301C"/>
+            <a:srgbClr val="EDF3E2"/>
           </a:solidFill>
           <a:ln/>
         </p:spPr>
@@ -7962,26 +7942,6 @@
       <p:sp>
         <p:nvSpPr>
           <p:cNvPr id="4" name="Shape 2"/>
-          <p:cNvSpPr/>
-          <p:nvPr/>
-        </p:nvSpPr>
-        <p:spPr>
-          <a:xfrm>
-            <a:off x="10195560" y="1600200"/>
-            <a:ext cx="457200" cy="457200"/>
-          </a:xfrm>
-          <a:prstGeom prst="ellipse">
-            <a:avLst/>
-          </a:prstGeom>
-          <a:solidFill>
-            <a:srgbClr val="B5E048"/>
-          </a:solidFill>
-          <a:ln/>
-        </p:spPr>
-      </p:sp>
-      <p:sp>
-        <p:nvSpPr>
-          <p:cNvPr id="5" name="Shape 3"/>
           <p:cNvSpPr/>
           <p:nvPr/>
         </p:nvSpPr>
@@ -7994,14 +7954,14 @@
             <a:avLst/>
           </a:prstGeom>
           <a:solidFill>
-            <a:srgbClr val="1F5D33"/>
+            <a:srgbClr val="E4EFD6"/>
           </a:solidFill>
           <a:ln/>
         </p:spPr>
       </p:sp>
       <p:sp>
         <p:nvSpPr>
-          <p:cNvPr id="6" name="Text 4"/>
+          <p:cNvPr id="5" name="Text 3"/>
           <p:cNvSpPr/>
           <p:nvPr/>
         </p:nvSpPr>
@@ -8037,7 +7997,7 @@
       </p:sp>
       <p:sp>
         <p:nvSpPr>
-          <p:cNvPr id="7" name="Text 5"/>
+          <p:cNvPr id="6" name="Text 4"/>
           <p:cNvSpPr/>
           <p:nvPr/>
         </p:nvSpPr>
@@ -8062,7 +8022,7 @@
             <a:r>
               <a:rPr lang="en-US" sz="4200" b="1" dirty="0">
                 <a:solidFill>
-                  <a:srgbClr val="FFFFFF"/>
+                  <a:srgbClr val="1F5D33"/>
                 </a:solidFill>
                 <a:latin typeface="Calibri" pitchFamily="34" charset="0"/>
                 <a:ea typeface="Calibri" pitchFamily="34" charset="-122"/>
@@ -8076,7 +8036,7 @@
       </p:sp>
       <p:sp>
         <p:nvSpPr>
-          <p:cNvPr id="8" name="Text 6"/>
+          <p:cNvPr id="7" name="Text 5"/>
           <p:cNvSpPr/>
           <p:nvPr/>
         </p:nvSpPr>
@@ -8101,7 +8061,7 @@
             <a:r>
               <a:rPr lang="en-US" sz="1800" dirty="0">
                 <a:solidFill>
-                  <a:srgbClr val="B5E048"/>
+                  <a:srgbClr val="2C6E3F"/>
                 </a:solidFill>
                 <a:latin typeface="Calibri" pitchFamily="34" charset="0"/>
                 <a:ea typeface="Calibri" pitchFamily="34" charset="-122"/>
@@ -8115,7 +8075,7 @@
       </p:sp>
       <p:sp>
         <p:nvSpPr>
-          <p:cNvPr id="9" name="Shape 7"/>
+          <p:cNvPr id="8" name="Shape 6"/>
           <p:cNvSpPr/>
           <p:nvPr/>
         </p:nvSpPr>
@@ -8137,7 +8097,7 @@
       </p:sp>
       <p:sp>
         <p:nvSpPr>
-          <p:cNvPr id="10" name="Text 8"/>
+          <p:cNvPr id="9" name="Text 7"/>
           <p:cNvSpPr/>
           <p:nvPr/>
         </p:nvSpPr>
@@ -8176,7 +8136,7 @@
       </p:sp>
       <p:sp>
         <p:nvSpPr>
-          <p:cNvPr id="11" name="Shape 9"/>
+          <p:cNvPr id="10" name="Shape 8"/>
           <p:cNvSpPr/>
           <p:nvPr/>
         </p:nvSpPr>
@@ -8198,7 +8158,7 @@
       </p:sp>
       <p:sp>
         <p:nvSpPr>
-          <p:cNvPr id="12" name="Text 10"/>
+          <p:cNvPr id="11" name="Text 9"/>
           <p:cNvSpPr/>
           <p:nvPr/>
         </p:nvSpPr>
@@ -8237,7 +8197,7 @@
       </p:sp>
       <p:sp>
         <p:nvSpPr>
-          <p:cNvPr id="13" name="Shape 11"/>
+          <p:cNvPr id="12" name="Shape 10"/>
           <p:cNvSpPr/>
           <p:nvPr/>
         </p:nvSpPr>
@@ -8259,7 +8219,7 @@
       </p:sp>
       <p:sp>
         <p:nvSpPr>
-          <p:cNvPr id="14" name="Text 12"/>
+          <p:cNvPr id="13" name="Text 11"/>
           <p:cNvSpPr/>
           <p:nvPr/>
         </p:nvSpPr>
@@ -8298,7 +8258,7 @@
       </p:sp>
       <p:sp>
         <p:nvSpPr>
-          <p:cNvPr id="15" name="Text 13"/>
+          <p:cNvPr id="14" name="Text 12"/>
           <p:cNvSpPr/>
           <p:nvPr/>
         </p:nvSpPr>
@@ -8326,7 +8286,7 @@
             <a:r>
               <a:rPr lang="en-US" sz="1400" b="1" dirty="0">
                 <a:solidFill>
-                  <a:srgbClr val="CBD8C2"/>
+                  <a:srgbClr val="16241A"/>
                 </a:solidFill>
                 <a:latin typeface="Calibri" pitchFamily="34" charset="0"/>
                 <a:ea typeface="Calibri" pitchFamily="34" charset="-122"/>
@@ -8344,7 +8304,7 @@
             <a:r>
               <a:rPr lang="en-US" sz="1250" dirty="0">
                 <a:solidFill>
-                  <a:srgbClr val="9FB396"/>
+                  <a:srgbClr val="5B6B57"/>
                 </a:solidFill>
                 <a:latin typeface="Calibri" pitchFamily="34" charset="0"/>
                 <a:ea typeface="Calibri" pitchFamily="34" charset="-122"/>
@@ -11748,7 +11708,7 @@
     <p:bg>
       <p:bgPr>
         <a:solidFill>
-          <a:srgbClr val="0E1C12"/>
+          <a:srgbClr val="F4F7EF"/>
         </a:solidFill>
       </p:bgPr>
     </p:bg>
@@ -11774,14 +11734,14 @@
         </p:nvSpPr>
         <p:spPr>
           <a:xfrm>
-            <a:off x="9235440" y="-1737360"/>
-            <a:ext cx="5120640" cy="5120640"/>
+            <a:off x="10835640" y="5349240"/>
+            <a:ext cx="3200400" cy="3200400"/>
           </a:xfrm>
           <a:prstGeom prst="ellipse">
             <a:avLst/>
           </a:prstGeom>
           <a:solidFill>
-            <a:srgbClr val="1F5D33"/>
+            <a:srgbClr val="ECF3DF"/>
           </a:solidFill>
           <a:ln/>
         </p:spPr>
@@ -11794,41 +11754,21 @@
         </p:nvSpPr>
         <p:spPr>
           <a:xfrm>
-            <a:off x="10972800" y="2651760"/>
-            <a:ext cx="2011680" cy="2011680"/>
+            <a:off x="-868680" y="-868680"/>
+            <a:ext cx="2103120" cy="2103120"/>
           </a:xfrm>
           <a:prstGeom prst="ellipse">
             <a:avLst/>
           </a:prstGeom>
           <a:solidFill>
-            <a:srgbClr val="18301C"/>
+            <a:srgbClr val="EDF3E2"/>
           </a:solidFill>
           <a:ln/>
         </p:spPr>
       </p:sp>
       <p:sp>
         <p:nvSpPr>
-          <p:cNvPr id="4" name="Shape 2"/>
-          <p:cNvSpPr/>
-          <p:nvPr/>
-        </p:nvSpPr>
-        <p:spPr>
-          <a:xfrm>
-            <a:off x="10195560" y="1600200"/>
-            <a:ext cx="457200" cy="457200"/>
-          </a:xfrm>
-          <a:prstGeom prst="ellipse">
-            <a:avLst/>
-          </a:prstGeom>
-          <a:solidFill>
-            <a:srgbClr val="B5E048"/>
-          </a:solidFill>
-          <a:ln/>
-        </p:spPr>
-      </p:sp>
-      <p:sp>
-        <p:nvSpPr>
-          <p:cNvPr id="5" name="Text 3"/>
+          <p:cNvPr id="4" name="Text 2"/>
           <p:cNvSpPr/>
           <p:nvPr/>
         </p:nvSpPr>
@@ -11853,7 +11793,7 @@
             <a:r>
               <a:rPr lang="en-US" sz="900" b="1" dirty="0">
                 <a:solidFill>
-                  <a:srgbClr val="B5E048"/>
+                  <a:srgbClr val="1F5D33"/>
                 </a:solidFill>
                 <a:latin typeface="Calibri" pitchFamily="34" charset="0"/>
                 <a:ea typeface="Calibri" pitchFamily="34" charset="-122"/>
@@ -11867,7 +11807,7 @@
             <a:r>
               <a:rPr lang="en-US" sz="900" dirty="0">
                 <a:solidFill>
-                  <a:srgbClr val="7C8E72"/>
+                  <a:srgbClr val="9AA892"/>
                 </a:solidFill>
                 <a:latin typeface="Calibri" pitchFamily="34" charset="0"/>
                 <a:ea typeface="Calibri" pitchFamily="34" charset="-122"/>
@@ -11881,7 +11821,7 @@
       </p:sp>
       <p:sp>
         <p:nvSpPr>
-          <p:cNvPr id="6" name="Text 4"/>
+          <p:cNvPr id="5" name="Text 3"/>
           <p:cNvSpPr/>
           <p:nvPr/>
         </p:nvSpPr>
@@ -11906,7 +11846,7 @@
             <a:r>
               <a:rPr lang="en-US" sz="900" dirty="0">
                 <a:solidFill>
-                  <a:srgbClr val="7C8E72"/>
+                  <a:srgbClr val="9AA892"/>
                 </a:solidFill>
                 <a:latin typeface="Calibri" pitchFamily="34" charset="0"/>
                 <a:ea typeface="Calibri" pitchFamily="34" charset="-122"/>
@@ -11920,7 +11860,7 @@
       </p:sp>
       <p:sp>
         <p:nvSpPr>
-          <p:cNvPr id="7" name="Shape 5"/>
+          <p:cNvPr id="6" name="Shape 4"/>
           <p:cNvSpPr/>
           <p:nvPr/>
         </p:nvSpPr>
@@ -11942,7 +11882,7 @@
       </p:sp>
       <p:sp>
         <p:nvSpPr>
-          <p:cNvPr id="8" name="Text 6"/>
+          <p:cNvPr id="7" name="Text 5"/>
           <p:cNvSpPr/>
           <p:nvPr/>
         </p:nvSpPr>
@@ -11981,7 +11921,7 @@
       </p:sp>
       <p:sp>
         <p:nvSpPr>
-          <p:cNvPr id="9" name="Text 7"/>
+          <p:cNvPr id="8" name="Text 6"/>
           <p:cNvSpPr/>
           <p:nvPr/>
         </p:nvSpPr>
@@ -12006,7 +11946,7 @@
             <a:r>
               <a:rPr lang="en-US" sz="3300" b="1" dirty="0">
                 <a:solidFill>
-                  <a:srgbClr val="FFFFFF"/>
+                  <a:srgbClr val="16241A"/>
                 </a:solidFill>
                 <a:latin typeface="Calibri" pitchFamily="34" charset="0"/>
                 <a:ea typeface="Calibri" pitchFamily="34" charset="-122"/>
@@ -12020,7 +11960,7 @@
       </p:sp>
       <p:sp>
         <p:nvSpPr>
-          <p:cNvPr id="10" name="Shape 8"/>
+          <p:cNvPr id="9" name="Shape 7"/>
           <p:cNvSpPr/>
           <p:nvPr/>
         </p:nvSpPr>
@@ -12049,7 +11989,7 @@
       </p:sp>
       <p:pic>
         <p:nvPicPr>
-          <p:cNvPr id="11" name="Image 0" descr="/tmp/claude-0/-home-user-kulpio/cf44c086-5ab5-569b-8ab9-43d11bcfa910/scratchpad/shots/scard.png">    </p:cNvPr>
+          <p:cNvPr id="10" name="Image 0" descr="/tmp/claude-0/-home-user-kulpio/cf44c086-5ab5-569b-8ab9-43d11bcfa910/scratchpad/shots/ls-scan.png">    </p:cNvPr>
           <p:cNvPicPr>
             <a:picLocks noChangeAspect="1"/>
           </p:cNvPicPr>
@@ -12073,7 +12013,7 @@
       </p:pic>
       <p:sp>
         <p:nvSpPr>
-          <p:cNvPr id="12" name="Shape 9"/>
+          <p:cNvPr id="11" name="Shape 8"/>
           <p:cNvSpPr/>
           <p:nvPr/>
         </p:nvSpPr>
@@ -12102,7 +12042,7 @@
       </p:sp>
       <p:pic>
         <p:nvPicPr>
-          <p:cNvPr id="13" name="Image 1" descr="/tmp/claude-0/-home-user-kulpio/cf44c086-5ab5-569b-8ab9-43d11bcfa910/scratchpad/shots/impact.png">    </p:cNvPr>
+          <p:cNvPr id="12" name="Image 1" descr="/tmp/claude-0/-home-user-kulpio/cf44c086-5ab5-569b-8ab9-43d11bcfa910/scratchpad/shots/ls-impact.png">    </p:cNvPr>
           <p:cNvPicPr>
             <a:picLocks noChangeAspect="1"/>
           </p:cNvPicPr>
@@ -12126,7 +12066,7 @@
       </p:pic>
       <p:sp>
         <p:nvSpPr>
-          <p:cNvPr id="14" name="Shape 10"/>
+          <p:cNvPr id="13" name="Shape 9"/>
           <p:cNvSpPr/>
           <p:nvPr/>
         </p:nvSpPr>
@@ -12155,7 +12095,7 @@
       </p:sp>
       <p:pic>
         <p:nvPicPr>
-          <p:cNvPr id="15" name="Image 2" descr="/tmp/claude-0/-home-user-kulpio/cf44c086-5ab5-569b-8ab9-43d11bcfa910/scratchpad/shots/chat.png">    </p:cNvPr>
+          <p:cNvPr id="14" name="Image 2" descr="/tmp/claude-0/-home-user-kulpio/cf44c086-5ab5-569b-8ab9-43d11bcfa910/scratchpad/shots/ls-discover.png">    </p:cNvPr>
           <p:cNvPicPr>
             <a:picLocks noChangeAspect="1"/>
           </p:cNvPicPr>
@@ -12179,7 +12119,7 @@
       </p:pic>
       <p:sp>
         <p:nvSpPr>
-          <p:cNvPr id="16" name="Text 11"/>
+          <p:cNvPr id="15" name="Text 10"/>
           <p:cNvSpPr/>
           <p:nvPr/>
         </p:nvSpPr>
@@ -12204,7 +12144,7 @@
             <a:r>
               <a:rPr lang="en-US" sz="1300" b="1" dirty="0">
                 <a:solidFill>
-                  <a:srgbClr val="FFFFFF"/>
+                  <a:srgbClr val="16241A"/>
                 </a:solidFill>
                 <a:latin typeface="Calibri" pitchFamily="34" charset="0"/>
                 <a:ea typeface="Calibri" pitchFamily="34" charset="-122"/>
@@ -12219,13 +12159,13 @@
             <a:r>
               <a:rPr lang="en-US" sz="1100" dirty="0">
                 <a:solidFill>
-                  <a:srgbClr val="9FB396"/>
-                </a:solidFill>
-                <a:latin typeface="Calibri" pitchFamily="34" charset="0"/>
-                <a:ea typeface="Calibri" pitchFamily="34" charset="-122"/>
-                <a:cs typeface="Calibri" pitchFamily="34" charset="-120"/>
-              </a:rPr>
-              <a:t>additives, Nutri-Score, verdict</a:t>
+                  <a:srgbClr val="5B6B57"/>
+                </a:solidFill>
+                <a:latin typeface="Calibri" pitchFamily="34" charset="0"/>
+                <a:ea typeface="Calibri" pitchFamily="34" charset="-122"/>
+                <a:cs typeface="Calibri" pitchFamily="34" charset="-120"/>
+              </a:rPr>
+              <a:t>Nutri-Score, allergens, verdict</a:t>
             </a:r>
             <a:endParaRPr lang="en-US" sz="1300" dirty="0"/>
           </a:p>
@@ -12233,7 +12173,7 @@
       </p:sp>
       <p:sp>
         <p:nvSpPr>
-          <p:cNvPr id="17" name="Text 12"/>
+          <p:cNvPr id="16" name="Text 11"/>
           <p:cNvSpPr/>
           <p:nvPr/>
         </p:nvSpPr>
@@ -12258,7 +12198,7 @@
             <a:r>
               <a:rPr lang="en-US" sz="1300" b="1" dirty="0">
                 <a:solidFill>
-                  <a:srgbClr val="FFFFFF"/>
+                  <a:srgbClr val="16241A"/>
                 </a:solidFill>
                 <a:latin typeface="Calibri" pitchFamily="34" charset="0"/>
                 <a:ea typeface="Calibri" pitchFamily="34" charset="-122"/>
@@ -12273,7 +12213,7 @@
             <a:r>
               <a:rPr lang="en-US" sz="1100" dirty="0">
                 <a:solidFill>
-                  <a:srgbClr val="9FB396"/>
+                  <a:srgbClr val="5B6B57"/>
                 </a:solidFill>
                 <a:latin typeface="Calibri" pitchFamily="34" charset="0"/>
                 <a:ea typeface="Calibri" pitchFamily="34" charset="-122"/>
@@ -12287,7 +12227,7 @@
       </p:sp>
       <p:sp>
         <p:nvSpPr>
-          <p:cNvPr id="18" name="Text 13"/>
+          <p:cNvPr id="17" name="Text 12"/>
           <p:cNvSpPr/>
           <p:nvPr/>
         </p:nvSpPr>
@@ -12312,13 +12252,13 @@
             <a:r>
               <a:rPr lang="en-US" sz="1300" b="1" dirty="0">
                 <a:solidFill>
-                  <a:srgbClr val="FFFFFF"/>
-                </a:solidFill>
-                <a:latin typeface="Calibri" pitchFamily="34" charset="0"/>
-                <a:ea typeface="Calibri" pitchFamily="34" charset="-122"/>
-                <a:cs typeface="Calibri" pitchFamily="34" charset="-120"/>
-              </a:rPr>
-              <a:t>Shared fridge
+                  <a:srgbClr val="16241A"/>
+                </a:solidFill>
+                <a:latin typeface="Calibri" pitchFamily="34" charset="0"/>
+                <a:ea typeface="Calibri" pitchFamily="34" charset="-122"/>
+                <a:cs typeface="Calibri" pitchFamily="34" charset="-120"/>
+              </a:rPr>
+              <a:t>Discover
 </a:t>
             </a:r>
             <a:pPr algn="ctr" indent="0" marL="0">
@@ -12327,13 +12267,13 @@
             <a:r>
               <a:rPr lang="en-US" sz="1100" dirty="0">
                 <a:solidFill>
-                  <a:srgbClr val="9FB396"/>
-                </a:solidFill>
-                <a:latin typeface="Calibri" pitchFamily="34" charset="0"/>
-                <a:ea typeface="Calibri" pitchFamily="34" charset="-122"/>
-                <a:cs typeface="Calibri" pitchFamily="34" charset="-120"/>
-              </a:rPr>
-              <a:t>members, activity &amp; chat</a:t>
+                  <a:srgbClr val="5B6B57"/>
+                </a:solidFill>
+                <a:latin typeface="Calibri" pitchFamily="34" charset="0"/>
+                <a:ea typeface="Calibri" pitchFamily="34" charset="-122"/>
+                <a:cs typeface="Calibri" pitchFamily="34" charset="-120"/>
+              </a:rPr>
+              <a:t>what the community scans</a:t>
             </a:r>
             <a:endParaRPr lang="en-US" sz="1300" dirty="0"/>
           </a:p>
@@ -12353,7 +12293,7 @@
     <p:bg>
       <p:bgPr>
         <a:solidFill>
-          <a:srgbClr val="0E1C12"/>
+          <a:srgbClr val="F4F7EF"/>
         </a:solidFill>
       </p:bgPr>
     </p:bg>
@@ -12379,14 +12319,14 @@
         </p:nvSpPr>
         <p:spPr>
           <a:xfrm>
-            <a:off x="9235440" y="-1737360"/>
-            <a:ext cx="5120640" cy="5120640"/>
+            <a:off x="10835640" y="5349240"/>
+            <a:ext cx="3200400" cy="3200400"/>
           </a:xfrm>
           <a:prstGeom prst="ellipse">
             <a:avLst/>
           </a:prstGeom>
           <a:solidFill>
-            <a:srgbClr val="1F5D33"/>
+            <a:srgbClr val="ECF3DF"/>
           </a:solidFill>
           <a:ln/>
         </p:spPr>
@@ -12399,41 +12339,21 @@
         </p:nvSpPr>
         <p:spPr>
           <a:xfrm>
-            <a:off x="10972800" y="2651760"/>
-            <a:ext cx="2011680" cy="2011680"/>
+            <a:off x="-868680" y="-868680"/>
+            <a:ext cx="2103120" cy="2103120"/>
           </a:xfrm>
           <a:prstGeom prst="ellipse">
             <a:avLst/>
           </a:prstGeom>
           <a:solidFill>
-            <a:srgbClr val="18301C"/>
+            <a:srgbClr val="EDF3E2"/>
           </a:solidFill>
           <a:ln/>
         </p:spPr>
       </p:sp>
       <p:sp>
         <p:nvSpPr>
-          <p:cNvPr id="4" name="Shape 2"/>
-          <p:cNvSpPr/>
-          <p:nvPr/>
-        </p:nvSpPr>
-        <p:spPr>
-          <a:xfrm>
-            <a:off x="10195560" y="1600200"/>
-            <a:ext cx="457200" cy="457200"/>
-          </a:xfrm>
-          <a:prstGeom prst="ellipse">
-            <a:avLst/>
-          </a:prstGeom>
-          <a:solidFill>
-            <a:srgbClr val="B5E048"/>
-          </a:solidFill>
-          <a:ln/>
-        </p:spPr>
-      </p:sp>
-      <p:sp>
-        <p:nvSpPr>
-          <p:cNvPr id="5" name="Text 3"/>
+          <p:cNvPr id="4" name="Text 2"/>
           <p:cNvSpPr/>
           <p:nvPr/>
         </p:nvSpPr>
@@ -12458,7 +12378,7 @@
             <a:r>
               <a:rPr lang="en-US" sz="900" b="1" dirty="0">
                 <a:solidFill>
-                  <a:srgbClr val="B5E048"/>
+                  <a:srgbClr val="1F5D33"/>
                 </a:solidFill>
                 <a:latin typeface="Calibri" pitchFamily="34" charset="0"/>
                 <a:ea typeface="Calibri" pitchFamily="34" charset="-122"/>
@@ -12472,7 +12392,7 @@
             <a:r>
               <a:rPr lang="en-US" sz="900" dirty="0">
                 <a:solidFill>
-                  <a:srgbClr val="7C8E72"/>
+                  <a:srgbClr val="9AA892"/>
                 </a:solidFill>
                 <a:latin typeface="Calibri" pitchFamily="34" charset="0"/>
                 <a:ea typeface="Calibri" pitchFamily="34" charset="-122"/>
@@ -12486,7 +12406,7 @@
       </p:sp>
       <p:sp>
         <p:nvSpPr>
-          <p:cNvPr id="6" name="Text 4"/>
+          <p:cNvPr id="5" name="Text 3"/>
           <p:cNvSpPr/>
           <p:nvPr/>
         </p:nvSpPr>
@@ -12511,7 +12431,7 @@
             <a:r>
               <a:rPr lang="en-US" sz="900" dirty="0">
                 <a:solidFill>
-                  <a:srgbClr val="7C8E72"/>
+                  <a:srgbClr val="9AA892"/>
                 </a:solidFill>
                 <a:latin typeface="Calibri" pitchFamily="34" charset="0"/>
                 <a:ea typeface="Calibri" pitchFamily="34" charset="-122"/>
@@ -12525,7 +12445,7 @@
       </p:sp>
       <p:sp>
         <p:nvSpPr>
-          <p:cNvPr id="7" name="Shape 5"/>
+          <p:cNvPr id="6" name="Shape 4"/>
           <p:cNvSpPr/>
           <p:nvPr/>
         </p:nvSpPr>
@@ -12547,7 +12467,7 @@
       </p:sp>
       <p:sp>
         <p:nvSpPr>
-          <p:cNvPr id="8" name="Text 6"/>
+          <p:cNvPr id="7" name="Text 5"/>
           <p:cNvSpPr/>
           <p:nvPr/>
         </p:nvSpPr>
@@ -12586,7 +12506,7 @@
       </p:sp>
       <p:sp>
         <p:nvSpPr>
-          <p:cNvPr id="9" name="Text 7"/>
+          <p:cNvPr id="8" name="Text 6"/>
           <p:cNvSpPr/>
           <p:nvPr/>
         </p:nvSpPr>
@@ -12611,7 +12531,7 @@
             <a:r>
               <a:rPr lang="en-US" sz="3300" b="1" dirty="0">
                 <a:solidFill>
-                  <a:srgbClr val="FFFFFF"/>
+                  <a:srgbClr val="16241A"/>
                 </a:solidFill>
                 <a:latin typeface="Calibri" pitchFamily="34" charset="0"/>
                 <a:ea typeface="Calibri" pitchFamily="34" charset="-122"/>
@@ -12625,7 +12545,7 @@
       </p:sp>
       <p:sp>
         <p:nvSpPr>
-          <p:cNvPr id="10" name="Shape 8"/>
+          <p:cNvPr id="9" name="Shape 7"/>
           <p:cNvSpPr/>
           <p:nvPr/>
         </p:nvSpPr>
@@ -12654,7 +12574,7 @@
       </p:sp>
       <p:pic>
         <p:nvPicPr>
-          <p:cNvPr id="11" name="Image 0" descr="/tmp/claude-0/-home-user-kulpio/cf44c086-5ab5-569b-8ab9-43d11bcfa910/scratchpad/shots/big-home.png">    </p:cNvPr>
+          <p:cNvPr id="10" name="Image 0" descr="/tmp/claude-0/-home-user-kulpio/cf44c086-5ab5-569b-8ab9-43d11bcfa910/scratchpad/shots/ls-home.png">    </p:cNvPr>
           <p:cNvPicPr>
             <a:picLocks noChangeAspect="1"/>
           </p:cNvPicPr>
@@ -12678,7 +12598,7 @@
       </p:pic>
       <p:sp>
         <p:nvSpPr>
-          <p:cNvPr id="12" name="Text 9"/>
+          <p:cNvPr id="11" name="Text 8"/>
           <p:cNvSpPr/>
           <p:nvPr/>
         </p:nvSpPr>
@@ -12703,7 +12623,7 @@
             <a:r>
               <a:rPr lang="en-US" sz="1200" b="1" dirty="0">
                 <a:solidFill>
-                  <a:srgbClr val="FFFFFF"/>
+                  <a:srgbClr val="16241A"/>
                 </a:solidFill>
                 <a:latin typeface="Calibri" pitchFamily="34" charset="0"/>
                 <a:ea typeface="Calibri" pitchFamily="34" charset="-122"/>
@@ -12718,7 +12638,7 @@
             <a:r>
               <a:rPr lang="en-US" sz="1000" dirty="0">
                 <a:solidFill>
-                  <a:srgbClr val="9FB396"/>
+                  <a:srgbClr val="5B6B57"/>
                 </a:solidFill>
                 <a:latin typeface="Calibri" pitchFamily="34" charset="0"/>
                 <a:ea typeface="Calibri" pitchFamily="34" charset="-122"/>
@@ -12732,7 +12652,7 @@
       </p:sp>
       <p:sp>
         <p:nvSpPr>
-          <p:cNvPr id="13" name="Shape 10"/>
+          <p:cNvPr id="12" name="Shape 9"/>
           <p:cNvSpPr/>
           <p:nvPr/>
         </p:nvSpPr>
@@ -12761,7 +12681,7 @@
       </p:sp>
       <p:pic>
         <p:nvPicPr>
-          <p:cNvPr id="14" name="Image 1" descr="/tmp/claude-0/-home-user-kulpio/cf44c086-5ab5-569b-8ab9-43d11bcfa910/scratchpad/shots/house.png">    </p:cNvPr>
+          <p:cNvPr id="13" name="Image 1" descr="/tmp/claude-0/-home-user-kulpio/cf44c086-5ab5-569b-8ab9-43d11bcfa910/scratchpad/shots/ls-recipes.png">    </p:cNvPr>
           <p:cNvPicPr>
             <a:picLocks noChangeAspect="1"/>
           </p:cNvPicPr>
@@ -12785,7 +12705,7 @@
       </p:pic>
       <p:sp>
         <p:nvSpPr>
-          <p:cNvPr id="15" name="Text 11"/>
+          <p:cNvPr id="14" name="Text 10"/>
           <p:cNvSpPr/>
           <p:nvPr/>
         </p:nvSpPr>
@@ -12810,13 +12730,13 @@
             <a:r>
               <a:rPr lang="en-US" sz="1200" b="1" dirty="0">
                 <a:solidFill>
-                  <a:srgbClr val="FFFFFF"/>
-                </a:solidFill>
-                <a:latin typeface="Calibri" pitchFamily="34" charset="0"/>
-                <a:ea typeface="Calibri" pitchFamily="34" charset="-122"/>
-                <a:cs typeface="Calibri" pitchFamily="34" charset="-120"/>
-              </a:rPr>
-              <a:t>Shared fridge
+                  <a:srgbClr val="16241A"/>
+                </a:solidFill>
+                <a:latin typeface="Calibri" pitchFamily="34" charset="0"/>
+                <a:ea typeface="Calibri" pitchFamily="34" charset="-122"/>
+                <a:cs typeface="Calibri" pitchFamily="34" charset="-120"/>
+              </a:rPr>
+              <a:t>Recipes
 </a:t>
             </a:r>
             <a:pPr algn="ctr" indent="0" marL="0">
@@ -12825,13 +12745,13 @@
             <a:r>
               <a:rPr lang="en-US" sz="1000" dirty="0">
                 <a:solidFill>
-                  <a:srgbClr val="9FB396"/>
-                </a:solidFill>
-                <a:latin typeface="Calibri" pitchFamily="34" charset="0"/>
-                <a:ea typeface="Calibri" pitchFamily="34" charset="-122"/>
-                <a:cs typeface="Calibri" pitchFamily="34" charset="-120"/>
-              </a:rPr>
-              <a:t>one code links your household</a:t>
+                  <a:srgbClr val="5B6B57"/>
+                </a:solidFill>
+                <a:latin typeface="Calibri" pitchFamily="34" charset="0"/>
+                <a:ea typeface="Calibri" pitchFamily="34" charset="-122"/>
+                <a:cs typeface="Calibri" pitchFamily="34" charset="-120"/>
+              </a:rPr>
+              <a:t>cook from what you have</a:t>
             </a:r>
             <a:endParaRPr lang="en-US" sz="1200" dirty="0"/>
           </a:p>
@@ -12839,7 +12759,7 @@
       </p:sp>
       <p:sp>
         <p:nvSpPr>
-          <p:cNvPr id="16" name="Shape 12"/>
+          <p:cNvPr id="15" name="Shape 11"/>
           <p:cNvSpPr/>
           <p:nvPr/>
         </p:nvSpPr>
@@ -12868,7 +12788,7 @@
       </p:sp>
       <p:pic>
         <p:nvPicPr>
-          <p:cNvPr id="17" name="Image 2" descr="/tmp/claude-0/-home-user-kulpio/cf44c086-5ab5-569b-8ab9-43d11bcfa910/scratchpad/shots/gdpr.png">    </p:cNvPr>
+          <p:cNvPr id="16" name="Image 2" descr="/tmp/claude-0/-home-user-kulpio/cf44c086-5ab5-569b-8ab9-43d11bcfa910/scratchpad/shots/light-detail.png">    </p:cNvPr>
           <p:cNvPicPr>
             <a:picLocks noChangeAspect="1"/>
           </p:cNvPicPr>
@@ -12892,7 +12812,7 @@
       </p:pic>
       <p:sp>
         <p:nvSpPr>
-          <p:cNvPr id="18" name="Text 13"/>
+          <p:cNvPr id="17" name="Text 12"/>
           <p:cNvSpPr/>
           <p:nvPr/>
         </p:nvSpPr>
@@ -12917,13 +12837,13 @@
             <a:r>
               <a:rPr lang="en-US" sz="1200" b="1" dirty="0">
                 <a:solidFill>
-                  <a:srgbClr val="FFFFFF"/>
-                </a:solidFill>
-                <a:latin typeface="Calibri" pitchFamily="34" charset="0"/>
-                <a:ea typeface="Calibri" pitchFamily="34" charset="-122"/>
-                <a:cs typeface="Calibri" pitchFamily="34" charset="-120"/>
-              </a:rPr>
-              <a:t>Your data
+                  <a:srgbClr val="16241A"/>
+                </a:solidFill>
+                <a:latin typeface="Calibri" pitchFamily="34" charset="0"/>
+                <a:ea typeface="Calibri" pitchFamily="34" charset="-122"/>
+                <a:cs typeface="Calibri" pitchFamily="34" charset="-120"/>
+              </a:rPr>
+              <a:t>Every item, one tap
 </a:t>
             </a:r>
             <a:pPr algn="ctr" indent="0" marL="0">
@@ -12932,13 +12852,13 @@
             <a:r>
               <a:rPr lang="en-US" sz="1000" dirty="0">
                 <a:solidFill>
-                  <a:srgbClr val="9FB396"/>
-                </a:solidFill>
-                <a:latin typeface="Calibri" pitchFamily="34" charset="0"/>
-                <a:ea typeface="Calibri" pitchFamily="34" charset="-122"/>
-                <a:cs typeface="Calibri" pitchFamily="34" charset="-120"/>
-              </a:rPr>
-              <a:t>export or delete anytime</a:t>
+                  <a:srgbClr val="5B6B57"/>
+                </a:solidFill>
+                <a:latin typeface="Calibri" pitchFamily="34" charset="0"/>
+                <a:ea typeface="Calibri" pitchFamily="34" charset="-122"/>
+                <a:cs typeface="Calibri" pitchFamily="34" charset="-120"/>
+              </a:rPr>
+              <a:t>edit, price history, storage</a:t>
             </a:r>
             <a:endParaRPr lang="en-US" sz="1200" dirty="0"/>
           </a:p>
@@ -12946,7 +12866,7 @@
       </p:sp>
       <p:sp>
         <p:nvSpPr>
-          <p:cNvPr id="19" name="Shape 14"/>
+          <p:cNvPr id="18" name="Shape 13"/>
           <p:cNvSpPr/>
           <p:nvPr/>
         </p:nvSpPr>
@@ -12975,7 +12895,7 @@
       </p:sp>
       <p:pic>
         <p:nvPicPr>
-          <p:cNvPr id="20" name="Image 3" descr="/tmp/claude-0/-home-user-kulpio/cf44c086-5ab5-569b-8ab9-43d11bcfa910/scratchpad/shots/profile-full.png">    </p:cNvPr>
+          <p:cNvPr id="19" name="Image 3" descr="/tmp/claude-0/-home-user-kulpio/cf44c086-5ab5-569b-8ab9-43d11bcfa910/scratchpad/shots/ls-profile.png">    </p:cNvPr>
           <p:cNvPicPr>
             <a:picLocks noChangeAspect="1"/>
           </p:cNvPicPr>
@@ -12999,7 +12919,7 @@
       </p:pic>
       <p:sp>
         <p:nvSpPr>
-          <p:cNvPr id="21" name="Text 15"/>
+          <p:cNvPr id="20" name="Text 14"/>
           <p:cNvSpPr/>
           <p:nvPr/>
         </p:nvSpPr>
@@ -13024,7 +12944,7 @@
             <a:r>
               <a:rPr lang="en-US" sz="1200" b="1" dirty="0">
                 <a:solidFill>
-                  <a:srgbClr val="FFFFFF"/>
+                  <a:srgbClr val="16241A"/>
                 </a:solidFill>
                 <a:latin typeface="Calibri" pitchFamily="34" charset="0"/>
                 <a:ea typeface="Calibri" pitchFamily="34" charset="-122"/>
@@ -13039,7 +12959,7 @@
             <a:r>
               <a:rPr lang="en-US" sz="1000" dirty="0">
                 <a:solidFill>
-                  <a:srgbClr val="9FB396"/>
+                  <a:srgbClr val="5B6B57"/>
                 </a:solidFill>
                 <a:latin typeface="Calibri" pitchFamily="34" charset="0"/>
                 <a:ea typeface="Calibri" pitchFamily="34" charset="-122"/>
